--- a/Portofolio-Analisis-Kemiskinan.pptx
+++ b/Portofolio-Analisis-Kemiskinan.pptx
@@ -4314,7 +4314,7 @@
               </a:defRPr>
             </a:pPr>
             <a:r>
-              <a:t>Seluruh angka dikompilasi dari BRS BPS dan dapat ditelusur di data/SOURCES.md. P1/P2 2019 tidak terverifikasi sehingga seri indeks mulai Mar 2020; perubahan provinsi dibatasi 32 provinsi sebanding.</a:t>
+              <a:t>Seluruh angka dikompilasi dari BRS BPS dan dapat ditelusur di data/SOURCES.md. P1/P2 kini lengkap Mar 2019–Mar 2026 dari Tabel 6 BRS; perubahan provinsi dibatasi 32 provinsi sebanding.</a:t>
             </a:r>
           </a:p>
         </p:txBody>
@@ -8365,7 +8365,7 @@
         <p:spPr>
           <a:xfrm>
             <a:off x="432000" y="1116000"/>
-            <a:ext cx="7056000" cy="3205237"/>
+            <a:ext cx="7056000" cy="3206933"/>
           </a:xfrm>
           <a:prstGeom prst="rect">
             <a:avLst/>
